--- a/10-Knowledge-Products/KP2-GIF/videos/module_5/en/decks/KP2_M5_5.7_Deck_v0.2.pptx
+++ b/10-Knowledge-Products/KP2-GIF/videos/module_5/en/decks/KP2_M5_5.7_Deck_v0.2.pptx
@@ -11635,7 +11635,7 @@
                 </a:solidFill>
                 <a:latin typeface="Arial"/>
               </a:rPr>
-              <a:t>KP2 · MODULE 5 · VIDEO 5.7</a:t>
+              <a:t>MODULE 5 · VIDEO 5.7</a:t>
             </a:r>
           </a:p>
         </p:txBody>
